--- a/Web Development Course/L25_synchrounous_asynchrounous/l25_synchrounous_asynchrounous.pptx
+++ b/Web Development Course/L25_synchrounous_asynchrounous/l25_synchrounous_asynchrounous.pptx
@@ -306,7 +306,7 @@
           <a:p>
             <a:fld id="{4AAD347D-5ACD-4C99-B74B-A9C85AD731AF}" type="datetimeFigureOut">
               <a:rPr lang="en-US" dirty="0"/>
-              <a:t>1/18/2026</a:t>
+              <a:t>1/19/2026</a:t>
             </a:fld>
             <a:endParaRPr lang="en-US" dirty="0"/>
           </a:p>
@@ -584,7 +584,7 @@
           <a:p>
             <a:fld id="{4509A250-FF31-4206-8172-F9D3106AACB1}" type="datetimeFigureOut">
               <a:rPr lang="en-US" dirty="0"/>
-              <a:t>1/18/2026</a:t>
+              <a:t>1/19/2026</a:t>
             </a:fld>
             <a:endParaRPr lang="en-US" dirty="0"/>
           </a:p>
@@ -781,7 +781,7 @@
           <a:p>
             <a:fld id="{4509A250-FF31-4206-8172-F9D3106AACB1}" type="datetimeFigureOut">
               <a:rPr lang="en-US" dirty="0"/>
-              <a:t>1/18/2026</a:t>
+              <a:t>1/19/2026</a:t>
             </a:fld>
             <a:endParaRPr lang="en-US" dirty="0"/>
           </a:p>
@@ -1052,7 +1052,7 @@
           <a:p>
             <a:fld id="{4509A250-FF31-4206-8172-F9D3106AACB1}" type="datetimeFigureOut">
               <a:rPr lang="en-US" dirty="0"/>
-              <a:t>1/18/2026</a:t>
+              <a:t>1/19/2026</a:t>
             </a:fld>
             <a:endParaRPr lang="en-US" dirty="0"/>
           </a:p>
@@ -1387,7 +1387,7 @@
           <a:p>
             <a:fld id="{4509A250-FF31-4206-8172-F9D3106AACB1}" type="datetimeFigureOut">
               <a:rPr lang="en-US" dirty="0"/>
-              <a:t>1/18/2026</a:t>
+              <a:t>1/19/2026</a:t>
             </a:fld>
             <a:endParaRPr lang="en-US" dirty="0"/>
           </a:p>
@@ -2000,7 +2000,7 @@
           <a:p>
             <a:fld id="{4509A250-FF31-4206-8172-F9D3106AACB1}" type="datetimeFigureOut">
               <a:rPr lang="en-US" dirty="0"/>
-              <a:t>1/18/2026</a:t>
+              <a:t>1/19/2026</a:t>
             </a:fld>
             <a:endParaRPr lang="en-US" dirty="0"/>
           </a:p>
@@ -2850,7 +2850,7 @@
           <a:p>
             <a:fld id="{4509A250-FF31-4206-8172-F9D3106AACB1}" type="datetimeFigureOut">
               <a:rPr lang="en-US" dirty="0"/>
-              <a:t>1/18/2026</a:t>
+              <a:t>1/19/2026</a:t>
             </a:fld>
             <a:endParaRPr lang="en-US" dirty="0"/>
           </a:p>
@@ -3023,7 +3023,7 @@
           <a:p>
             <a:fld id="{4509A250-FF31-4206-8172-F9D3106AACB1}" type="datetimeFigureOut">
               <a:rPr lang="en-US" dirty="0"/>
-              <a:t>1/18/2026</a:t>
+              <a:t>1/19/2026</a:t>
             </a:fld>
             <a:endParaRPr lang="en-US" dirty="0"/>
           </a:p>
@@ -3206,7 +3206,7 @@
           <a:p>
             <a:fld id="{4509A250-FF31-4206-8172-F9D3106AACB1}" type="datetimeFigureOut">
               <a:rPr lang="en-US" dirty="0"/>
-              <a:t>1/18/2026</a:t>
+              <a:t>1/19/2026</a:t>
             </a:fld>
             <a:endParaRPr lang="en-US" dirty="0"/>
           </a:p>
@@ -3379,7 +3379,7 @@
           <a:p>
             <a:fld id="{4509A250-FF31-4206-8172-F9D3106AACB1}" type="datetimeFigureOut">
               <a:rPr lang="en-US" dirty="0"/>
-              <a:t>1/18/2026</a:t>
+              <a:t>1/19/2026</a:t>
             </a:fld>
             <a:endParaRPr lang="en-US" dirty="0"/>
           </a:p>
@@ -3626,7 +3626,7 @@
           <a:p>
             <a:fld id="{4509A250-FF31-4206-8172-F9D3106AACB1}" type="datetimeFigureOut">
               <a:rPr lang="en-US" dirty="0"/>
-              <a:t>1/18/2026</a:t>
+              <a:t>1/19/2026</a:t>
             </a:fld>
             <a:endParaRPr lang="en-US" dirty="0"/>
           </a:p>
@@ -3921,7 +3921,7 @@
           <a:p>
             <a:fld id="{4509A250-FF31-4206-8172-F9D3106AACB1}" type="datetimeFigureOut">
               <a:rPr lang="en-US" dirty="0"/>
-              <a:t>1/18/2026</a:t>
+              <a:t>1/19/2026</a:t>
             </a:fld>
             <a:endParaRPr lang="en-US" dirty="0"/>
           </a:p>
@@ -4362,7 +4362,7 @@
           <a:p>
             <a:fld id="{4509A250-FF31-4206-8172-F9D3106AACB1}" type="datetimeFigureOut">
               <a:rPr lang="en-US" dirty="0"/>
-              <a:t>1/18/2026</a:t>
+              <a:t>1/19/2026</a:t>
             </a:fld>
             <a:endParaRPr lang="en-US" dirty="0"/>
           </a:p>
@@ -4483,7 +4483,7 @@
           <a:p>
             <a:fld id="{4509A250-FF31-4206-8172-F9D3106AACB1}" type="datetimeFigureOut">
               <a:rPr lang="en-US" dirty="0"/>
-              <a:t>1/18/2026</a:t>
+              <a:t>1/19/2026</a:t>
             </a:fld>
             <a:endParaRPr lang="en-US" dirty="0"/>
           </a:p>
@@ -4581,7 +4581,7 @@
           <a:p>
             <a:fld id="{4509A250-FF31-4206-8172-F9D3106AACB1}" type="datetimeFigureOut">
               <a:rPr lang="en-US" dirty="0"/>
-              <a:t>1/18/2026</a:t>
+              <a:t>1/19/2026</a:t>
             </a:fld>
             <a:endParaRPr lang="en-US" dirty="0"/>
           </a:p>
@@ -4863,7 +4863,7 @@
           <a:p>
             <a:fld id="{4509A250-FF31-4206-8172-F9D3106AACB1}" type="datetimeFigureOut">
               <a:rPr lang="en-US" dirty="0"/>
-              <a:t>1/18/2026</a:t>
+              <a:t>1/19/2026</a:t>
             </a:fld>
             <a:endParaRPr lang="en-US" dirty="0"/>
           </a:p>
@@ -5141,7 +5141,7 @@
           <a:p>
             <a:fld id="{4509A250-FF31-4206-8172-F9D3106AACB1}" type="datetimeFigureOut">
               <a:rPr lang="en-US" dirty="0"/>
-              <a:t>1/18/2026</a:t>
+              <a:t>1/19/2026</a:t>
             </a:fld>
             <a:endParaRPr lang="en-US" dirty="0"/>
           </a:p>
@@ -5573,7 +5573,7 @@
           <a:p>
             <a:fld id="{4509A250-FF31-4206-8172-F9D3106AACB1}" type="datetimeFigureOut">
               <a:rPr lang="en-US" dirty="0"/>
-              <a:t>1/18/2026</a:t>
+              <a:t>1/19/2026</a:t>
             </a:fld>
             <a:endParaRPr lang="en-US" dirty="0"/>
           </a:p>
@@ -9546,13 +9546,8 @@
           <a:p>
             <a:r>
               <a:rPr lang="en-US" sz="3200" b="1" u="sng" dirty="0"/>
-              <a:t>Why Asynchronous Code is </a:t>
-            </a:r>
-            <a:r>
-              <a:rPr lang="en-US" sz="3200" b="1" u="sng" dirty="0"/>
-              <a:t>Important ?</a:t>
-            </a:r>
-            <a:endParaRPr lang="en-US" sz="3200" b="1" u="sng" dirty="0"/>
+              <a:t>Why Asynchronous Code is Important ?</a:t>
+            </a:r>
           </a:p>
           <a:p>
             <a:pPr marL="342900" indent="-342900">
